--- a/dist/초1/환경·생태/자연만나기/초1_환경·생태_자연만나기_01_주변생물관찰과보호.pptx
+++ b/dist/초1/환경·생태/자연만나기/초1_환경·생태_자연만나기_01_주변생물관찰과보호.pptx
@@ -114,34 +114,34 @@
   <p:extLst>
     <p:ext uri="{521415D9-36F7-43E2-AB2F-B90AF26B5E84}">
       <p14:sectionLst xmlns:p14="http://schemas.microsoft.com/office/powerpoint/2010/main">
-        <p14:section name="도입" id="{64c3eea6-4cd7-2495-b7cd-c4292dd0510c}">
+        <p14:section name="도입" id="{364d2d49-d665-50f0-e304-053407341a33}">
           <p14:sldIdLst>
             <p14:sldId id="256"/>
             <p14:sldId id="257"/>
           </p14:sldIdLst>
         </p14:section>
-        <p14:section name="개념" id="{ad9a67c5-f732-f7c9-fa39-81f2b0a89e8d}">
+        <p14:section name="개념" id="{8467fb19-c44a-8990-72be-e9cbab46fe39}">
           <p14:sldIdLst>
             <p14:sldId id="258"/>
           </p14:sldIdLst>
         </p14:section>
-        <p14:section name="연습" id="{13c29cb0-049c-675c-d239-ddefc1d2bd4e}">
+        <p14:section name="연습" id="{26eeea40-86bc-c949-1c89-e27640e03dd6}">
           <p14:sldIdLst>
             <p14:sldId id="259"/>
             <p14:sldId id="260"/>
           </p14:sldIdLst>
         </p14:section>
-        <p14:section name="확인" id="{02a39f14-282b-f0c7-f150-817c1f91e76f}">
+        <p14:section name="확인" id="{2cb373db-66b1-8f47-02c6-c3e16cf168e7}">
           <p14:sldIdLst>
             <p14:sldId id="261"/>
           </p14:sldIdLst>
         </p14:section>
-        <p14:section name="정리" id="{e8b11ea3-7ce8-90cf-c791-c4f6c805552a}">
+        <p14:section name="정리" id="{dadfe4fb-e0c1-9f1f-2335-6ae7c8781fe7}">
           <p14:sldIdLst>
             <p14:sldId id="262"/>
           </p14:sldIdLst>
         </p14:section>
-        <p14:section name="보충" id="{d05001c7-93e0-5f9a-0e2a-a62888ab9d27}">
+        <p14:section name="보충" id="{16742652-f176-b14a-d940-9119bec29f8a}">
           <p14:sldIdLst>
             <p14:sldId id="263"/>
           </p14:sldIdLst>
